--- a/carpentry/intake-142/PowerPoint/Day-26_2026-12-16_Week-8.pptx
+++ b/carpentry/intake-142/PowerPoint/Day-26_2026-12-16_Week-8.pptx
@@ -794,7 +794,7 @@
           <a:p/>
           <a:p>
             <a:r>
-              <a:t>The twelve questions are listed in a fixed order. Number your response page from one to twelve so each method can be matched to its prompt. You may use your chosen calculator, the textbook formula sheet on page 219 and conversion factors on pages 220–221 under these stated conditions. Keep your own working for every item. The evidence will help us choose useful corrections afterward, so an honest record of an uncertain attempt is more helpful than a copied answer.</a:t>
+              <a:t>The twelve questions are listed in a fixed order. Number your response page from one to twelve so each method can be matched to its prompt. You may use your chosen calculator, the textbook formula sheet on page 361 and conversion factors on pages 362–363 under these stated conditions. Keep your own working for every item. The evidence will help us choose useful corrections afterward, so an honest record of an uncertain attempt is more helpful than a copied answer.</a:t>
             </a:r>
           </a:p>
         </p:txBody>
@@ -2842,7 +2842,7 @@
           <a:p/>
           <a:p>
             <a:r>
-              <a:t>If fractions are your priority, use the regrouping explanation and offcut diagram on page 66. A length can be partitioned differently without changing its total. When the fractional part is too small for the subtraction, exchange one whole for a full denominator's worth of fractional parts. What must happen to the whole-number part? It decreases by one. What must happen to the fractional part? It gains an equivalent whole. Keeping both changes visible prevents the common error of adding fractional pieces without preserving the original total.</a:t>
+              <a:t>If fractions are your priority, use the regrouping explanation and offcut diagram on page 99. A length can be partitioned differently without changing its total. When the fractional part is too small for the subtraction, exchange one whole for a full denominator's worth of fractional parts. What must happen to the whole-number part? It decreases by one. What must happen to the fractional part? It gains an equivalent whole. Keeping both changes visible prevents the common error of adding fractional pieces without preserving the original total.</a:t>
             </a:r>
           </a:p>
         </p:txBody>
@@ -5228,7 +5228,7 @@
                 </a:solidFill>
                 <a:latin typeface="Arial"/>
               </a:rPr>
-              <a:t>Textbook formula sheet p.219; conversion factors pp.220–221 permitted for this proposed formative check</a:t>
+              <a:t>Textbook formula sheet p.361; conversion factors pp.362–363 permitted for this proposed formative check</a:t>
             </a:r>
           </a:p>
         </p:txBody>
@@ -5914,7 +5914,7 @@
                 </a:solidFill>
                 <a:latin typeface="Arial"/>
               </a:rPr>
-              <a:t>Textbook formula sheet p.219; conversion factors pp.220–221 permitted for this proposed formative check</a:t>
+              <a:t>Textbook formula sheet p.361; conversion factors pp.362–363 permitted for this proposed formative check</a:t>
             </a:r>
           </a:p>
         </p:txBody>
@@ -6600,7 +6600,7 @@
                 </a:solidFill>
                 <a:latin typeface="Arial"/>
               </a:rPr>
-              <a:t>Textbook formula sheet p.219; conversion factors pp.220–221 permitted for this proposed formative check</a:t>
+              <a:t>Textbook formula sheet p.361; conversion factors pp.362–363 permitted for this proposed formative check</a:t>
             </a:r>
           </a:p>
         </p:txBody>
@@ -7311,7 +7311,7 @@
                 </a:solidFill>
                 <a:latin typeface="Arial"/>
               </a:rPr>
-              <a:t>Textbook formula sheet p.219; conversion factors pp.220–221 permitted for this proposed formative check</a:t>
+              <a:t>Textbook formula sheet p.361; conversion factors pp.362–363 permitted for this proposed formative check</a:t>
             </a:r>
           </a:p>
         </p:txBody>
@@ -8022,7 +8022,7 @@
                 </a:solidFill>
                 <a:latin typeface="Arial"/>
               </a:rPr>
-              <a:t>Textbook formula sheet p.219; conversion factors pp.220–221 permitted for this proposed formative check</a:t>
+              <a:t>Textbook formula sheet p.361; conversion factors pp.362–363 permitted for this proposed formative check</a:t>
             </a:r>
           </a:p>
         </p:txBody>
@@ -8733,7 +8733,7 @@
                 </a:solidFill>
                 <a:latin typeface="Arial"/>
               </a:rPr>
-              <a:t>Textbook formula sheet p.219; conversion factors pp.220–221 permitted for this proposed formative check</a:t>
+              <a:t>Textbook formula sheet p.361; conversion factors pp.362–363 permitted for this proposed formative check</a:t>
             </a:r>
           </a:p>
         </p:txBody>
@@ -9419,7 +9419,7 @@
                 </a:solidFill>
                 <a:latin typeface="Arial"/>
               </a:rPr>
-              <a:t>Textbook formula sheet p.219; conversion factors pp.220–221 permitted for this proposed formative check</a:t>
+              <a:t>Textbook formula sheet p.361; conversion factors pp.362–363 permitted for this proposed formative check</a:t>
             </a:r>
           </a:p>
         </p:txBody>
@@ -10130,7 +10130,7 @@
                 </a:solidFill>
                 <a:latin typeface="Arial"/>
               </a:rPr>
-              <a:t>Textbook formula sheet p.219; conversion factors pp.220–221 permitted for this proposed formative check</a:t>
+              <a:t>Textbook formula sheet p.361; conversion factors pp.362–363 permitted for this proposed formative check</a:t>
             </a:r>
           </a:p>
         </p:txBody>
@@ -10841,7 +10841,7 @@
                 </a:solidFill>
                 <a:latin typeface="Arial"/>
               </a:rPr>
-              <a:t>Textbook formula sheet p.219; conversion factors pp.220–221 permitted for this proposed formative check</a:t>
+              <a:t>Textbook formula sheet p.361; conversion factors pp.362–363 permitted for this proposed formative check</a:t>
             </a:r>
           </a:p>
         </p:txBody>
@@ -11552,7 +11552,7 @@
                 </a:solidFill>
                 <a:latin typeface="Arial"/>
               </a:rPr>
-              <a:t>Textbook formula sheet p.219; conversion factors pp.220–221 permitted for this proposed formative check</a:t>
+              <a:t>Textbook formula sheet p.361; conversion factors pp.362–363 permitted for this proposed formative check</a:t>
             </a:r>
           </a:p>
         </p:txBody>
@@ -15615,7 +15615,7 @@
                 </a:solidFill>
                 <a:latin typeface="Arial"/>
               </a:rPr>
-              <a:t>Textbook formula sheet p.219; conversion factors pp.220–221 permitted for this proposed formative check</a:t>
+              <a:t>Textbook formula sheet p.361; conversion factors pp.362–363 permitted for this proposed formative check</a:t>
             </a:r>
           </a:p>
         </p:txBody>
@@ -16326,7 +16326,7 @@
                 </a:solidFill>
                 <a:latin typeface="Arial"/>
               </a:rPr>
-              <a:t>Textbook formula sheet p.219; conversion factors pp.220–221 permitted for this proposed formative check</a:t>
+              <a:t>Textbook formula sheet p.361; conversion factors pp.362–363 permitted for this proposed formative check</a:t>
             </a:r>
           </a:p>
         </p:txBody>
@@ -17037,7 +17037,7 @@
                 </a:solidFill>
                 <a:latin typeface="Arial"/>
               </a:rPr>
-              <a:t>Textbook formula sheet p.219; conversion factors pp.220–221 permitted for this proposed formative check</a:t>
+              <a:t>Textbook formula sheet p.361; conversion factors pp.362–363 permitted for this proposed formative check</a:t>
             </a:r>
           </a:p>
         </p:txBody>
@@ -17237,7 +17237,7 @@
                 </a:solidFill>
                 <a:latin typeface="Arial"/>
               </a:rPr>
-              <a:t>Resources: Set in order: 4A Q14(a) p.26; 5A Q12 first value p.33; 6B Q2 p.41; 6A Q19 p.40; 7A Q11 p.45; 8C Q1 p.55; 9A Q1 p.57; 10B Q11 p.66; 11A Q7 p.69; 12A Q10 p.76; 13A Q6,14 p.82.</a:t>
+              <a:t>Resources: Set in order: 4A Q14(a) p.36; 5A Q12 first value p.46; 6B Q2 p.57; 6A Q19 p.56; 7A Q11 p.68; 8C Q1 p.81; 9A Q1 p.85; 10B Q11 p.96; 11A Q7 p.103; 12A Q10 p.115; 13A Q6,14 p.128.</a:t>
             </a:r>
           </a:p>
         </p:txBody>
@@ -17851,7 +17851,7 @@
                 </a:solidFill>
                 <a:latin typeface="Arial"/>
               </a:rPr>
-              <a:t>Textbook formula sheet p.219; conversion factors pp.220–221 permitted for this proposed formative check</a:t>
+              <a:t>Textbook formula sheet p.361; conversion factors pp.362–363 permitted for this proposed formative check</a:t>
             </a:r>
           </a:p>
         </p:txBody>
@@ -18051,7 +18051,7 @@
                 </a:solidFill>
                 <a:latin typeface="Arial"/>
               </a:rPr>
-              <a:t>Resources: Set in order: 4A Q14(a) p.26; 5A Q12 first value p.33; 6B Q2 p.41; 6A Q19 p.40; 7A Q11 p.45; 8C Q1 p.55; 9A Q1 p.57; 10B Q11 p.66; 11A Q7 p.69; 12A Q10 p.76; 13A Q6,14 p.82.</a:t>
+              <a:t>Resources: Set in order: 4A Q14(a) p.36; 5A Q12 first value p.46; 6B Q2 p.57; 6A Q19 p.56; 7A Q11 p.68; 8C Q1 p.81; 9A Q1 p.85; 10B Q11 p.96; 11A Q7 p.103; 12A Q10 p.115; 13A Q6,14 p.128.</a:t>
             </a:r>
           </a:p>
         </p:txBody>
@@ -19330,7 +19330,7 @@
                 </a:solidFill>
                 <a:latin typeface="Arial"/>
               </a:rPr>
-              <a:t>Textbook relevant chapters from readiness errors; formula sheet p.219; glossary pp.222–225</a:t>
+              <a:t>Textbook relevant chapters from readiness errors; formula sheet p.361; glossary pp.364–368</a:t>
             </a:r>
           </a:p>
         </p:txBody>
@@ -19530,7 +19530,7 @@
                 </a:solidFill>
                 <a:latin typeface="Arial"/>
               </a:rPr>
-              <a:t>Textbook relevant chapters from readiness errors; formula sheet p.219; glossary pp.222–225</a:t>
+              <a:t>Textbook relevant chapters from readiness errors; formula sheet p.361; glossary pp.364–368</a:t>
             </a:r>
           </a:p>
         </p:txBody>
@@ -19578,7 +19578,7 @@
                 </a:solidFill>
                 <a:latin typeface="Arial"/>
               </a:rPr>
-              <a:t>Choose missed types from the readiness set. Fresh checks: 4A Q15(b) p.26; 7A Q12 p.45; 10A Q6 p.63; 12A Q12 p.76; 13A Q10 p.82.</a:t>
+              <a:t>Choose missed types from the readiness set. Fresh checks: 4A Q15(b) p.36; 7A Q12 p.68; 10A Q6 p.93; 12A Q12 p.115; 13A Q10 p.128.</a:t>
             </a:r>
           </a:p>
         </p:txBody>
@@ -20240,7 +20240,7 @@
                 </a:solidFill>
                 <a:latin typeface="Arial"/>
               </a:rPr>
-              <a:t>Textbook relevant chapters from readiness errors; formula sheet p.219; glossary pp.222–225</a:t>
+              <a:t>Textbook relevant chapters from readiness errors; formula sheet p.361; glossary pp.364–368</a:t>
             </a:r>
           </a:p>
         </p:txBody>
@@ -20440,7 +20440,7 @@
                 </a:solidFill>
                 <a:latin typeface="Arial"/>
               </a:rPr>
-              <a:t>Resources: Choose missed types from the readiness set. Fresh checks: 4A Q15(b) p.26; 7A Q12 p.45; 10A Q6 p.63; 12A Q12 p.76; 13A Q10 p.82.</a:t>
+              <a:t>Resources: Choose missed types from the readiness set. Fresh checks: 4A Q15(b) p.36; 7A Q12 p.68; 10A Q6 p.93; 12A Q12 p.115; 13A Q10 p.128.</a:t>
             </a:r>
           </a:p>
         </p:txBody>
@@ -21189,7 +21189,7 @@
                 </a:solidFill>
                 <a:latin typeface="Arial"/>
               </a:rPr>
-              <a:t>Textbook relevant chapters from readiness errors; formula sheet p.219; glossary pp.222–225</a:t>
+              <a:t>Textbook relevant chapters from readiness errors; formula sheet p.361; glossary pp.364–368</a:t>
             </a:r>
           </a:p>
         </p:txBody>
@@ -21543,7 +21543,7 @@
                 </a:solidFill>
                 <a:latin typeface="Arial"/>
               </a:rPr>
-              <a:t>Use the relevant Textbook chapter, formula sheet p.219 and glossary pp.222–225 to make the explanation precise.</a:t>
+              <a:t>Use the relevant Textbook chapter, formula sheet p.361 and glossary pp.364–368 to make the explanation precise.</a:t>
             </a:r>
           </a:p>
         </p:txBody>
@@ -22410,7 +22410,7 @@
                 </a:solidFill>
                 <a:latin typeface="Arial"/>
               </a:rPr>
-              <a:t>Textbook relevant chapters from readiness errors; formula sheet p.219; glossary pp.222–225</a:t>
+              <a:t>Textbook relevant chapters from readiness errors; formula sheet p.361; glossary pp.364–368</a:t>
             </a:r>
           </a:p>
         </p:txBody>
@@ -24344,7 +24344,7 @@
                 </a:solidFill>
                 <a:latin typeface="Arial"/>
               </a:rPr>
-              <a:t>Textbook formula sheet p.219; conversion factors pp.220–221 permitted for this proposed formative check</a:t>
+              <a:t>Textbook formula sheet p.361; conversion factors pp.362–363 permitted for this proposed formative check</a:t>
             </a:r>
           </a:p>
         </p:txBody>
@@ -24544,7 +24544,7 @@
                 </a:solidFill>
                 <a:latin typeface="Arial"/>
               </a:rPr>
-              <a:t>Textbook formula sheet p.219; conversion factors pp.220–221 permitted for this proposed formative check</a:t>
+              <a:t>Textbook formula sheet p.361; conversion factors pp.362–363 permitted for this proposed formative check</a:t>
             </a:r>
           </a:p>
         </p:txBody>
@@ -24592,7 +24592,7 @@
                 </a:solidFill>
                 <a:latin typeface="Arial"/>
               </a:rPr>
-              <a:t>Set in order: 4A Q14(a) p.26; 5A Q12 first value p.33; 6B Q2 p.41; 6A Q19 p.40; 7A Q11 p.45; 8C Q1 p.55; 9A Q1 p.57; 10B Q11 p.66; 11A Q7 p.69; 12A Q10 p.76; 13A Q6,14 p.82.</a:t>
+              <a:t>Set in order: 4A Q14(a) p.36; 5A Q12 first value p.46; 6B Q2 p.57; 6A Q19 p.56; 7A Q11 p.68; 8C Q1 p.81; 9A Q1 p.85; 10B Q11 p.96; 11A Q7 p.103; 12A Q10 p.115; 13A Q6,14 p.128.</a:t>
             </a:r>
           </a:p>
         </p:txBody>
@@ -25206,7 +25206,7 @@
                 </a:solidFill>
                 <a:latin typeface="Arial"/>
               </a:rPr>
-              <a:t>Textbook  |  page 66</a:t>
+              <a:t>Textbook  |  page 99</a:t>
             </a:r>
           </a:p>
         </p:txBody>
@@ -25254,7 +25254,7 @@
                 </a:solidFill>
                 <a:latin typeface="Arial"/>
               </a:rPr>
-              <a:t>Textbook relevant chapters from readiness errors; formula sheet p.219; glossary pp.222–225</a:t>
+              <a:t>Textbook relevant chapters from readiness errors; formula sheet p.361; glossary pp.364–368</a:t>
             </a:r>
           </a:p>
         </p:txBody>
@@ -25892,7 +25892,7 @@
                 </a:solidFill>
                 <a:latin typeface="Arial"/>
               </a:rPr>
-              <a:t>Textbook  |  page 66</a:t>
+              <a:t>Textbook  |  page 99</a:t>
             </a:r>
           </a:p>
         </p:txBody>
@@ -25940,7 +25940,7 @@
                 </a:solidFill>
                 <a:latin typeface="Arial"/>
               </a:rPr>
-              <a:t>Textbook relevant chapters from readiness errors; formula sheet p.219; glossary pp.222–225</a:t>
+              <a:t>Textbook relevant chapters from readiness errors; formula sheet p.361; glossary pp.364–368</a:t>
             </a:r>
           </a:p>
         </p:txBody>
@@ -26626,7 +26626,7 @@
                 </a:solidFill>
                 <a:latin typeface="Arial"/>
               </a:rPr>
-              <a:t>Textbook relevant chapters from readiness errors; formula sheet p.219; glossary pp.222–225</a:t>
+              <a:t>Textbook relevant chapters from readiness errors; formula sheet p.361; glossary pp.364–368</a:t>
             </a:r>
           </a:p>
         </p:txBody>
@@ -27384,7 +27384,7 @@
                 </a:solidFill>
                 <a:latin typeface="Arial"/>
               </a:rPr>
-              <a:t>Textbook relevant chapters from readiness errors; formula sheet p.219; glossary pp.222–225</a:t>
+              <a:t>Textbook relevant chapters from readiness errors; formula sheet p.361; glossary pp.364–368</a:t>
             </a:r>
           </a:p>
         </p:txBody>
@@ -27584,7 +27584,7 @@
                 </a:solidFill>
                 <a:latin typeface="Arial"/>
               </a:rPr>
-              <a:t>Resources: Choose missed types from the readiness set. Fresh checks: 4A Q15(b) p.26; 7A Q12 p.45; 10A Q6 p.63; 12A Q12 p.76; 13A Q10 p.82.</a:t>
+              <a:t>Resources: Choose missed types from the readiness set. Fresh checks: 4A Q15(b) p.36; 7A Q12 p.68; 10A Q6 p.93; 12A Q12 p.115; 13A Q10 p.128.</a:t>
             </a:r>
           </a:p>
         </p:txBody>
@@ -28198,7 +28198,7 @@
                 </a:solidFill>
                 <a:latin typeface="Arial"/>
               </a:rPr>
-              <a:t>Textbook relevant chapters from readiness errors; formula sheet p.219; glossary pp.222–225</a:t>
+              <a:t>Textbook relevant chapters from readiness errors; formula sheet p.361; glossary pp.364–368</a:t>
             </a:r>
           </a:p>
         </p:txBody>
@@ -28398,7 +28398,7 @@
                 </a:solidFill>
                 <a:latin typeface="Arial"/>
               </a:rPr>
-              <a:t>Resources: Choose missed types from the readiness set. Fresh checks: 4A Q15(b) p.26; 7A Q12 p.45; 10A Q6 p.63; 12A Q12 p.76; 13A Q10 p.82.</a:t>
+              <a:t>Resources: Choose missed types from the readiness set. Fresh checks: 4A Q15(b) p.36; 7A Q12 p.68; 10A Q6 p.93; 12A Q12 p.115; 13A Q10 p.128.</a:t>
             </a:r>
           </a:p>
         </p:txBody>
@@ -29012,7 +29012,7 @@
                 </a:solidFill>
                 <a:latin typeface="Arial"/>
               </a:rPr>
-              <a:t>Textbook relevant chapters from readiness errors; formula sheet p.219; glossary pp.222–225</a:t>
+              <a:t>Textbook relevant chapters from readiness errors; formula sheet p.361; glossary pp.364–368</a:t>
             </a:r>
           </a:p>
         </p:txBody>
@@ -29788,7 +29788,7 @@
                 </a:solidFill>
                 <a:latin typeface="Arial"/>
               </a:rPr>
-              <a:t>Textbook relevant chapters from readiness errors; formula sheet p.219; glossary pp.222–225</a:t>
+              <a:t>Textbook relevant chapters from readiness errors; formula sheet p.361; glossary pp.364–368</a:t>
             </a:r>
           </a:p>
         </p:txBody>
@@ -30747,7 +30747,7 @@
                 </a:solidFill>
                 <a:latin typeface="Arial"/>
               </a:rPr>
-              <a:t>Textbook relevant chapters from readiness errors; formula sheet p.219; glossary pp.222–225</a:t>
+              <a:t>Textbook relevant chapters from readiness errors; formula sheet p.361; glossary pp.364–368</a:t>
             </a:r>
           </a:p>
         </p:txBody>
@@ -31433,7 +31433,7 @@
                 </a:solidFill>
                 <a:latin typeface="Arial"/>
               </a:rPr>
-              <a:t>Textbook relevant chapters from readiness errors; formula sheet p.219; glossary pp.222–225</a:t>
+              <a:t>Textbook relevant chapters from readiness errors; formula sheet p.361; glossary pp.364–368</a:t>
             </a:r>
           </a:p>
         </p:txBody>
@@ -32144,7 +32144,7 @@
                 </a:solidFill>
                 <a:latin typeface="Arial"/>
               </a:rPr>
-              <a:t>Textbook relevant chapters from readiness errors; formula sheet p.219; glossary pp.222–225</a:t>
+              <a:t>Textbook relevant chapters from readiness errors; formula sheet p.361; glossary pp.364–368</a:t>
             </a:r>
           </a:p>
         </p:txBody>
@@ -32344,7 +32344,7 @@
                 </a:solidFill>
                 <a:latin typeface="Arial"/>
               </a:rPr>
-              <a:t>Resources: Choose missed types from the readiness set. Fresh checks: 4A Q15(b) p.26; 7A Q12 p.45; 10A Q6 p.63; 12A Q12 p.76; 13A Q10 p.82.</a:t>
+              <a:t>Resources: Choose missed types from the readiness set. Fresh checks: 4A Q15(b) p.36; 7A Q12 p.68; 10A Q6 p.93; 12A Q12 p.115; 13A Q10 p.128.</a:t>
             </a:r>
           </a:p>
         </p:txBody>
@@ -32958,7 +32958,7 @@
                 </a:solidFill>
                 <a:latin typeface="Arial"/>
               </a:rPr>
-              <a:t>Textbook formula sheet p.219; conversion factors pp.220–221 permitted for this proposed formative check</a:t>
+              <a:t>Textbook formula sheet p.361; conversion factors pp.362–363 permitted for this proposed formative check</a:t>
             </a:r>
           </a:p>
         </p:txBody>
@@ -33158,7 +33158,7 @@
                 </a:solidFill>
                 <a:latin typeface="Arial"/>
               </a:rPr>
-              <a:t>Resources: Set in order: 4A Q14(a) p.26; 5A Q12 first value p.33; 6B Q2 p.41; 6A Q19 p.40; 7A Q11 p.45; 8C Q1 p.55; 9A Q1 p.57; 10B Q11 p.66; 11A Q7 p.69; 12A Q10 p.76; 13A Q6,14 p.82.</a:t>
+              <a:t>Resources: Set in order: 4A Q14(a) p.36; 5A Q12 first value p.46; 6B Q2 p.57; 6A Q19 p.56; 7A Q11 p.68; 8C Q1 p.81; 9A Q1 p.85; 10B Q11 p.96; 11A Q7 p.103; 12A Q10 p.115; 13A Q6,14 p.128.</a:t>
             </a:r>
           </a:p>
         </p:txBody>
@@ -33772,7 +33772,7 @@
                 </a:solidFill>
                 <a:latin typeface="Arial"/>
               </a:rPr>
-              <a:t>Textbook relevant chapters from readiness errors; formula sheet p.219; glossary pp.222–225</a:t>
+              <a:t>Textbook relevant chapters from readiness errors; formula sheet p.361; glossary pp.364–368</a:t>
             </a:r>
           </a:p>
         </p:txBody>
@@ -33972,7 +33972,7 @@
                 </a:solidFill>
                 <a:latin typeface="Arial"/>
               </a:rPr>
-              <a:t>Resources: Choose missed types from the readiness set. Fresh checks: 4A Q15(b) p.26; 7A Q12 p.45; 10A Q6 p.63; 12A Q12 p.76; 13A Q10 p.82.</a:t>
+              <a:t>Resources: Choose missed types from the readiness set. Fresh checks: 4A Q15(b) p.36; 7A Q12 p.68; 10A Q6 p.93; 12A Q12 p.115; 13A Q10 p.128.</a:t>
             </a:r>
           </a:p>
         </p:txBody>
@@ -34721,7 +34721,7 @@
                 </a:solidFill>
                 <a:latin typeface="Arial"/>
               </a:rPr>
-              <a:t>Textbook formula sheet p.219; conversion factors pp.220–221 permitted for this proposed formative check</a:t>
+              <a:t>Textbook formula sheet p.361; conversion factors pp.362–363 permitted for this proposed formative check</a:t>
             </a:r>
           </a:p>
         </p:txBody>
@@ -35942,7 +35942,7 @@
                 </a:solidFill>
                 <a:latin typeface="Arial"/>
               </a:rPr>
-              <a:t>Textbook formula sheet p.219; conversion factors pp.220–221 permitted for this proposed formative check</a:t>
+              <a:t>Textbook formula sheet p.361; conversion factors pp.362–363 permitted for this proposed formative check</a:t>
             </a:r>
           </a:p>
         </p:txBody>
@@ -36060,7 +36060,7 @@
                 </a:solidFill>
                 <a:latin typeface="Arial"/>
               </a:rPr>
-              <a:t>Use the chosen calculator, Textbook formula sheet p.219 and conversion factors pp.220–221 under the stated conditions.</a:t>
+              <a:t>Use the chosen calculator, Textbook formula sheet p.361 and conversion factors pp.362–363 under the stated conditions.</a:t>
             </a:r>
           </a:p>
         </p:txBody>
@@ -37028,7 +37028,7 @@
                 </a:solidFill>
                 <a:latin typeface="Arial"/>
               </a:rPr>
-              <a:t>Textbook formula sheet p.219; conversion factors pp.220–221 permitted for this proposed formative check</a:t>
+              <a:t>Textbook formula sheet p.361; conversion factors pp.362–363 permitted for this proposed formative check</a:t>
             </a:r>
           </a:p>
         </p:txBody>
@@ -37950,7 +37950,7 @@
                 </a:solidFill>
                 <a:latin typeface="Arial"/>
               </a:rPr>
-              <a:t>Textbook formula sheet p.219; conversion factors pp.220–221 permitted for this proposed formative check</a:t>
+              <a:t>Textbook formula sheet p.361; conversion factors pp.362–363 permitted for this proposed formative check</a:t>
             </a:r>
           </a:p>
         </p:txBody>
@@ -38150,7 +38150,7 @@
                 </a:solidFill>
                 <a:latin typeface="Arial"/>
               </a:rPr>
-              <a:t>Resources: Set in order: 4A Q14(a) p.26; 5A Q12 first value p.33; 6B Q2 p.41; 6A Q19 p.40; 7A Q11 p.45; 8C Q1 p.55; 9A Q1 p.57; 10B Q11 p.66; 11A Q7 p.69; 12A Q10 p.76; 13A Q6,14 p.82.</a:t>
+              <a:t>Resources: Set in order: 4A Q14(a) p.36; 5A Q12 first value p.46; 6B Q2 p.57; 6A Q19 p.56; 7A Q11 p.68; 8C Q1 p.81; 9A Q1 p.85; 10B Q11 p.96; 11A Q7 p.103; 12A Q10 p.115; 13A Q6,14 p.128.</a:t>
             </a:r>
           </a:p>
         </p:txBody>
@@ -38764,7 +38764,7 @@
                 </a:solidFill>
                 <a:latin typeface="Arial"/>
               </a:rPr>
-              <a:t>Textbook formula sheet p.219; conversion factors pp.220–221 permitted for this proposed formative check</a:t>
+              <a:t>Textbook formula sheet p.361; conversion factors pp.362–363 permitted for this proposed formative check</a:t>
             </a:r>
           </a:p>
         </p:txBody>
@@ -38964,7 +38964,7 @@
                 </a:solidFill>
                 <a:latin typeface="Arial"/>
               </a:rPr>
-              <a:t>Resources: Set in order: 4A Q14(a) p.26; 5A Q12 first value p.33; 6B Q2 p.41; 6A Q19 p.40; 7A Q11 p.45; 8C Q1 p.55; 9A Q1 p.57; 10B Q11 p.66; 11A Q7 p.69; 12A Q10 p.76; 13A Q6,14 p.82.</a:t>
+              <a:t>Resources: Set in order: 4A Q14(a) p.36; 5A Q12 first value p.46; 6B Q2 p.57; 6A Q19 p.56; 7A Q11 p.68; 8C Q1 p.81; 9A Q1 p.85; 10B Q11 p.96; 11A Q7 p.103; 12A Q10 p.115; 13A Q6,14 p.128.</a:t>
             </a:r>
           </a:p>
         </p:txBody>

--- a/carpentry/intake-142/PowerPoint/Day-26_2026-12-16_Week-8.pptx
+++ b/carpentry/intake-142/PowerPoint/Day-26_2026-12-16_Week-8.pptx
@@ -18324,6 +18324,104 @@
           </a:p>
         </p:txBody>
       </p:sp>
+      <p:sp>
+        <p:nvSpPr>
+          <p:cNvPr id="22" name="Play quiz W08-L03"/>
+          <p:cNvSpPr txBox="1"/>
+          <p:nvPr/>
+        </p:nvSpPr>
+        <p:spPr>
+          <a:xfrm>
+            <a:off x="6355080" y="6606540"/>
+            <a:ext cx="822960" cy="210312"/>
+          </a:xfrm>
+          <a:prstGeom prst="rect">
+            <a:avLst/>
+          </a:prstGeom>
+          <a:noFill/>
+        </p:spPr>
+        <p:txBody>
+          <a:bodyPr wrap="square" lIns="0" rIns="0" tIns="0" bIns="0" anchor="t">
+            <a:normAutofit fontScale="100000" lnSpcReduction="0"/>
+          </a:bodyPr>
+          <a:lstStyle/>
+          <a:p>
+            <a:pPr>
+              <a:spcBef>
+                <a:spcPts val="0"/>
+              </a:spcBef>
+              <a:spcAft>
+                <a:spcPts val="0"/>
+              </a:spcAft>
+              <a:defRPr sz="1000" b="0">
+                <a:solidFill>
+                  <a:srgbClr val="D0002B"/>
+                </a:solidFill>
+                <a:latin typeface="Arial"/>
+              </a:defRPr>
+            </a:pPr>
+            <a:r>
+              <a:rPr sz="1000">
+                <a:solidFill>
+                  <a:srgbClr val="F7F8FC"/>
+                </a:solidFill>
+                <a:latin typeface="Arial"/>
+                <a:hlinkClick r:id="rId8"/>
+              </a:rPr>
+              <a:t>Play quiz</a:t>
+            </a:r>
+          </a:p>
+        </p:txBody>
+      </p:sp>
+      <p:sp>
+        <p:nvSpPr>
+          <p:cNvPr id="23" name="Quiz PDF W08-L03"/>
+          <p:cNvSpPr txBox="1"/>
+          <p:nvPr/>
+        </p:nvSpPr>
+        <p:spPr>
+          <a:xfrm>
+            <a:off x="7296912" y="6606540"/>
+            <a:ext cx="1005840" cy="210312"/>
+          </a:xfrm>
+          <a:prstGeom prst="rect">
+            <a:avLst/>
+          </a:prstGeom>
+          <a:noFill/>
+        </p:spPr>
+        <p:txBody>
+          <a:bodyPr wrap="square" lIns="0" rIns="0" tIns="0" bIns="0" anchor="t">
+            <a:normAutofit fontScale="100000" lnSpcReduction="0"/>
+          </a:bodyPr>
+          <a:lstStyle/>
+          <a:p>
+            <a:pPr>
+              <a:spcBef>
+                <a:spcPts val="0"/>
+              </a:spcBef>
+              <a:spcAft>
+                <a:spcPts val="0"/>
+              </a:spcAft>
+              <a:defRPr sz="1000" b="0">
+                <a:solidFill>
+                  <a:srgbClr val="D0002B"/>
+                </a:solidFill>
+                <a:latin typeface="Arial"/>
+              </a:defRPr>
+            </a:pPr>
+            <a:r>
+              <a:rPr sz="1000">
+                <a:solidFill>
+                  <a:srgbClr val="F7F8FC"/>
+                </a:solidFill>
+                <a:latin typeface="Arial"/>
+                <a:hlinkClick r:id="rId9"/>
+              </a:rPr>
+              <a:t>Quiz PDF</a:t>
+            </a:r>
+          </a:p>
+        </p:txBody>
+      </p:sp>
     </p:spTree>
   </p:cSld>
   <p:clrMapOvr>
@@ -34241,6 +34339,104 @@
                 <a:latin typeface="Arial"/>
               </a:rPr>
               <a:t>Day 26  •  2026-12-16  •  40</a:t>
+            </a:r>
+          </a:p>
+        </p:txBody>
+      </p:sp>
+      <p:sp>
+        <p:nvSpPr>
+          <p:cNvPr id="22" name="Play quiz W08-L04"/>
+          <p:cNvSpPr txBox="1"/>
+          <p:nvPr/>
+        </p:nvSpPr>
+        <p:spPr>
+          <a:xfrm>
+            <a:off x="6355080" y="6606540"/>
+            <a:ext cx="822960" cy="210312"/>
+          </a:xfrm>
+          <a:prstGeom prst="rect">
+            <a:avLst/>
+          </a:prstGeom>
+          <a:noFill/>
+        </p:spPr>
+        <p:txBody>
+          <a:bodyPr wrap="square" lIns="0" rIns="0" tIns="0" bIns="0" anchor="t">
+            <a:normAutofit fontScale="100000" lnSpcReduction="0"/>
+          </a:bodyPr>
+          <a:lstStyle/>
+          <a:p>
+            <a:pPr>
+              <a:spcBef>
+                <a:spcPts val="0"/>
+              </a:spcBef>
+              <a:spcAft>
+                <a:spcPts val="0"/>
+              </a:spcAft>
+              <a:defRPr sz="1000" b="0">
+                <a:solidFill>
+                  <a:srgbClr val="D0002B"/>
+                </a:solidFill>
+                <a:latin typeface="Arial"/>
+              </a:defRPr>
+            </a:pPr>
+            <a:r>
+              <a:rPr sz="1000">
+                <a:solidFill>
+                  <a:srgbClr val="F7F8FC"/>
+                </a:solidFill>
+                <a:latin typeface="Arial"/>
+                <a:hlinkClick r:id="rId8"/>
+              </a:rPr>
+              <a:t>Play quiz</a:t>
+            </a:r>
+          </a:p>
+        </p:txBody>
+      </p:sp>
+      <p:sp>
+        <p:nvSpPr>
+          <p:cNvPr id="23" name="Quiz PDF W08-L04"/>
+          <p:cNvSpPr txBox="1"/>
+          <p:nvPr/>
+        </p:nvSpPr>
+        <p:spPr>
+          <a:xfrm>
+            <a:off x="7296912" y="6606540"/>
+            <a:ext cx="1005840" cy="210312"/>
+          </a:xfrm>
+          <a:prstGeom prst="rect">
+            <a:avLst/>
+          </a:prstGeom>
+          <a:noFill/>
+        </p:spPr>
+        <p:txBody>
+          <a:bodyPr wrap="square" lIns="0" rIns="0" tIns="0" bIns="0" anchor="t">
+            <a:normAutofit fontScale="100000" lnSpcReduction="0"/>
+          </a:bodyPr>
+          <a:lstStyle/>
+          <a:p>
+            <a:pPr>
+              <a:spcBef>
+                <a:spcPts val="0"/>
+              </a:spcBef>
+              <a:spcAft>
+                <a:spcPts val="0"/>
+              </a:spcAft>
+              <a:defRPr sz="1000" b="0">
+                <a:solidFill>
+                  <a:srgbClr val="D0002B"/>
+                </a:solidFill>
+                <a:latin typeface="Arial"/>
+              </a:defRPr>
+            </a:pPr>
+            <a:r>
+              <a:rPr sz="1000">
+                <a:solidFill>
+                  <a:srgbClr val="F7F8FC"/>
+                </a:solidFill>
+                <a:latin typeface="Arial"/>
+                <a:hlinkClick r:id="rId9"/>
+              </a:rPr>
+              <a:t>Quiz PDF</a:t>
             </a:r>
           </a:p>
         </p:txBody>
